--- a/presentation/NEURALIS-CONTENTFLOW.pptx
+++ b/presentation/NEURALIS-CONTENTFLOW.pptx
@@ -8114,7 +8114,7 @@
                 </a:solidFill>
                 <a:latin typeface="Consolas"/>
               </a:rPr>
-              <a:t>github.com/[username]/neuralis-contentflow</a:t>
+              <a:t>github.com/hazalakks/neuralis-contentflow</a:t>
             </a:r>
             <a:r>
               <a:rPr sz="1100" b="0" i="0">
